--- a/Estrategia y Transformacion/Descripciones de Puestos/Gerente Sr Comercial Servicios Financieros/ET - L2 Gerente Sr Comercial Servicios Financieros.pptx
+++ b/Estrategia y Transformacion/Descripciones de Puestos/Gerente Sr Comercial Servicios Financieros/ET - L2 Gerente Sr Comercial Servicios Financieros.pptx
@@ -4487,7 +4487,7 @@
               <a:defRPr/>
             </a:pPr>
             <a:r>
-              <a:rPr kumimoji="0" lang="es-MX" sz="1200" b="1" i="0" u="none" strike="noStrike" kern="1200" cap="none" spc="0" normalizeH="0" baseline="0" noProof="0" dirty="0">
+              <a:rPr kumimoji="0" lang="es-MX" sz="1100" b="0" i="0" u="none" strike="noStrike" kern="1200" cap="none" spc="0" normalizeH="0" baseline="0" noProof="0" dirty="0">
                 <a:ln>
                   <a:noFill/>
                 </a:ln>
@@ -4781,7 +4781,7 @@
               <a:defRPr/>
             </a:pPr>
             <a:r>
-              <a:rPr kumimoji="0" lang="es-MX" sz="800" b="0" i="0" u="none" strike="noStrike" kern="1200" cap="none" spc="0" normalizeH="0" baseline="0" noProof="0" dirty="0">
+              <a:rPr kumimoji="0" lang="es-MX" sz="900" b="0" i="0" u="none" strike="noStrike" kern="1200" cap="none" spc="0" normalizeH="0" baseline="0" noProof="0" dirty="0">
                 <a:ln>
                   <a:noFill/>
                 </a:ln>
@@ -4795,7 +4795,7 @@
                 <a:ea typeface="ＭＳ Ｐゴシック" charset="0"/>
                 <a:cs typeface="Arial"/>
               </a:rPr>
-              <a:t>Definir la estrategia integral de servicios financieros para maximizar el crecimiento rentable y la contribución al margen del negocio, mediante la priorización de iniciativas, alineación con objetivos corporativos y seguimiento a indicadores estratégicos.</a:t>
+              <a:t>Definir la estrategia integral de servicios financieros para maximizar el crecimiento rentable y la contribución al margen del negocio, mediante la priorización de iniciativas y seguimiento a indicadores estratégicos.</a:t>
             </a:r>
           </a:p>
           <a:p>
@@ -4819,7 +4819,7 @@
               <a:defRPr/>
             </a:pPr>
             <a:r>
-              <a:rPr kumimoji="0" lang="es-MX" sz="800" b="0" i="0" u="none" strike="noStrike" kern="1200" cap="none" spc="0" normalizeH="0" baseline="0" noProof="0" dirty="0">
+              <a:rPr kumimoji="0" lang="es-MX" sz="900" b="0" i="0" u="none" strike="noStrike" kern="1200" cap="none" spc="0" normalizeH="0" baseline="0" noProof="0" dirty="0">
                 <a:ln>
                   <a:noFill/>
                 </a:ln>
@@ -4857,7 +4857,7 @@
               <a:defRPr/>
             </a:pPr>
             <a:r>
-              <a:rPr kumimoji="0" lang="es-MX" sz="800" b="0" i="0" u="none" strike="noStrike" kern="1200" cap="none" spc="0" normalizeH="0" baseline="0" noProof="0" dirty="0">
+              <a:rPr kumimoji="0" lang="es-MX" sz="900" b="0" i="0" u="none" strike="noStrike" kern="1200" cap="none" spc="0" normalizeH="0" baseline="0" noProof="0" dirty="0">
                 <a:ln>
                   <a:noFill/>
                 </a:ln>
@@ -4871,7 +4871,7 @@
                 <a:ea typeface="ＭＳ Ｐゴシック" charset="0"/>
                 <a:cs typeface="Arial"/>
               </a:rPr>
-              <a:t>Impulsar el diseño, lanzamiento y escalamiento de nuevos productos financieros para diversificar fuentes de ingreso y fortalecer la propuesta de valor al cliente, mediante la gestión end-to-end del ciclo de producto y la evaluación de business cases.</a:t>
+              <a:t>Impulsar el diseño, lanzamiento y escalamiento de nuevos productos financieros para diversificar fuentes de ingreso, mediante la gestión end-to-end del ciclo de producto y la evaluación de business cases.</a:t>
             </a:r>
           </a:p>
           <a:p>
@@ -4895,7 +4895,7 @@
               <a:defRPr/>
             </a:pPr>
             <a:r>
-              <a:rPr kumimoji="0" lang="es-MX" sz="800" b="0" i="0" u="none" strike="noStrike" kern="1200" cap="none" spc="0" normalizeH="0" baseline="0" noProof="0" dirty="0">
+              <a:rPr kumimoji="0" lang="es-MX" sz="900" b="0" i="0" u="none" strike="noStrike" kern="1200" cap="none" spc="0" normalizeH="0" baseline="0" noProof="0" dirty="0">
                 <a:ln>
                   <a:noFill/>
                 </a:ln>
@@ -4909,7 +4909,7 @@
                 <a:ea typeface="ＭＳ Ｐゴシック" charset="0"/>
                 <a:cs typeface="Arial"/>
               </a:rPr>
-              <a:t>Liderar la gestión comercial y negociación con socios financieros estratégicos para asegurar condiciones competitivas y modelos de colaboración sostenibles, mediante acuerdos comerciales, administración de contratos y evaluación de desempeño de aliados.</a:t>
+              <a:t>Liderar la gestión comercial y negociación con socios financieros estratégicos para asegurar condiciones competitivas y modelos de colaboración sostenibles.</a:t>
             </a:r>
           </a:p>
           <a:p>
@@ -4933,7 +4933,7 @@
               <a:defRPr/>
             </a:pPr>
             <a:r>
-              <a:rPr kumimoji="0" lang="es-MX" sz="800" b="0" i="0" u="none" strike="noStrike" kern="1200" cap="none" spc="0" normalizeH="0" baseline="0" noProof="0" dirty="0">
+              <a:rPr kumimoji="0" lang="es-MX" sz="900" b="0" i="0" u="none" strike="noStrike" kern="1200" cap="none" spc="0" normalizeH="0" baseline="0" noProof="0" dirty="0">
                 <a:ln>
                   <a:noFill/>
                 </a:ln>
@@ -4947,7 +4947,7 @@
                 <a:ea typeface="ＭＳ Ｐゴシック" charset="0"/>
                 <a:cs typeface="Arial"/>
               </a:rPr>
-              <a:t>Asegurar la correcta ejecución operativa de los servicios financieros en tiendas para garantizar continuidad operativa y una experiencia confiable al cliente, a través de modelos de habilitación, seguimiento a KPIs operativos y estandarización de procesos.</a:t>
+              <a:t>Asegurar la correcta ejecución operativa de los servicios financieros en tiendas, a través de modelos de habilitación, seguimiento a KPIs operativos y estandarización de procesos.</a:t>
             </a:r>
           </a:p>
           <a:p>
@@ -4971,7 +4971,7 @@
               <a:defRPr/>
             </a:pPr>
             <a:r>
-              <a:rPr kumimoji="0" lang="es-MX" sz="800" b="0" i="0" u="none" strike="noStrike" kern="1200" cap="none" spc="0" normalizeH="0" baseline="0" noProof="0" dirty="0">
+              <a:rPr kumimoji="0" lang="es-MX" sz="900" b="0" i="0" u="none" strike="noStrike" kern="1200" cap="none" spc="0" normalizeH="0" baseline="0" noProof="0" dirty="0">
                 <a:ln>
                   <a:noFill/>
                 </a:ln>
@@ -4985,7 +4985,7 @@
                 <a:ea typeface="ＭＳ Ｐゴシック" charset="0"/>
                 <a:cs typeface="Arial"/>
               </a:rPr>
-              <a:t>Implementar iniciativas de mejora continua en la operación de servicios financieros para reducir fricción, errores y costos, mediante análisis de procesos, automatización y coordinación con las áreas de Operaciones y Tecnología.</a:t>
+              <a:t>Implementar iniciativas de mejora continua en la operación de servicios financieros para reducir fricción, errores y costos, coordinando con Operaciones y Tecnología.</a:t>
             </a:r>
           </a:p>
           <a:p>
@@ -5009,7 +5009,7 @@
               <a:defRPr/>
             </a:pPr>
             <a:r>
-              <a:rPr kumimoji="0" lang="es-MX" sz="800" b="0" i="0" u="none" strike="noStrike" kern="1200" cap="none" spc="0" normalizeH="0" baseline="0" noProof="0" dirty="0">
+              <a:rPr kumimoji="0" lang="es-MX" sz="900" b="0" i="0" u="none" strike="noStrike" kern="1200" cap="none" spc="0" normalizeH="0" baseline="0" noProof="0" dirty="0">
                 <a:ln>
                   <a:noFill/>
                 </a:ln>
@@ -5023,7 +5023,7 @@
                 <a:ea typeface="ＭＳ Ｐゴシック" charset="0"/>
                 <a:cs typeface="Arial"/>
               </a:rPr>
-              <a:t>Garantizar el cumplimiento regulatorio y la adecuada gestión de riesgos asociados a los servicios financieros, mediante la coordinación con áreas de Compliance, Legal, Asuntos Corporativos y atención a auditorías.</a:t>
+              <a:t>Garantizar el cumplimiento regulatorio y la adecuada gestión de riesgos asociados a los servicios financieros, coordinando con Compliance, Legal y Asuntos Corporativos.</a:t>
             </a:r>
           </a:p>
           <a:p>
@@ -5047,7 +5047,7 @@
               <a:defRPr/>
             </a:pPr>
             <a:r>
-              <a:rPr kumimoji="0" lang="es-MX" sz="800" b="0" i="0" u="none" strike="noStrike" kern="1200" cap="none" spc="0" normalizeH="0" baseline="0" noProof="0" dirty="0">
+              <a:rPr kumimoji="0" lang="es-MX" sz="900" b="0" i="0" u="none" strike="noStrike" kern="1200" cap="none" spc="0" normalizeH="0" baseline="0" noProof="0" dirty="0">
                 <a:ln>
                   <a:noFill/>
                 </a:ln>
@@ -5061,7 +5061,7 @@
                 <a:ea typeface="ＭＳ Ｐゴシック" charset="0"/>
                 <a:cs typeface="Arial"/>
               </a:rPr>
-              <a:t>Coordinar a las áreas comerciales, de producto, operaciones, tecnología y corporativas para asegurar la ejecución alineada de la estrategia de servicios financieros, a través de gobiernos de proyecto, comités y gestión transversal de stakeholders.</a:t>
+              <a:t>Coordinar a las áreas comerciales, de producto, operaciones, tecnología y corporativas para asegurar la ejecución alineada de la estrategia de servicios financieros.</a:t>
             </a:r>
           </a:p>
         </p:txBody>
@@ -5341,7 +5341,7 @@
               <a:defRPr/>
             </a:pPr>
             <a:r>
-              <a:rPr lang="es-MX" sz="1000" dirty="0">
+              <a:rPr lang="es-MX" sz="900" dirty="0" b="0">
                 <a:solidFill>
                   <a:prstClr val="black"/>
                 </a:solidFill>
@@ -5385,7 +5385,7 @@
               <a:defRPr/>
             </a:pPr>
             <a:r>
-              <a:rPr lang="es-MX" sz="1000" dirty="0">
+              <a:rPr lang="es-MX" sz="900" dirty="0" b="0">
                 <a:solidFill>
                   <a:prstClr val="black"/>
                 </a:solidFill>
@@ -5429,13 +5429,13 @@
               <a:defRPr/>
             </a:pPr>
             <a:r>
-              <a:rPr lang="es-MX" sz="1000" dirty="0">
+              <a:rPr lang="es-MX" sz="900" dirty="0" b="0">
                 <a:solidFill>
                   <a:prstClr val="black"/>
                 </a:solidFill>
                 <a:latin typeface="Calibri Light" panose="020F0302020204030204"/>
               </a:rPr>
-              <a:t>Definir la estrategia comercial y de monetización de los servicios financieros (tarifas, precios, incentivos y condiciones comerciales).</a:t>
+              <a:t>Definir la estrategia comercial y de monetización de los servicios financieros (tarifas, precios, incentivos y condiciones).</a:t>
             </a:r>
             <a:endParaRPr kumimoji="0" lang="es-MX" sz="1000" b="0" i="0" u="none" strike="noStrike" kern="1200" cap="none" spc="0" normalizeH="0" baseline="0" noProof="0" dirty="0">
               <a:ln>
@@ -5473,13 +5473,13 @@
               <a:defRPr/>
             </a:pPr>
             <a:r>
-              <a:rPr lang="es-MX" sz="1000" dirty="0">
+              <a:rPr lang="es-MX" sz="900" dirty="0" b="0">
                 <a:solidFill>
                   <a:prstClr val="black"/>
                 </a:solidFill>
                 <a:latin typeface="Calibri Light" panose="020F0302020204030204"/>
               </a:rPr>
-              <a:t>Priorizar el roadmap de iniciativas y productos, balanceando impacto financiero, time to market, riesgo regulatorio y capacidades operativas.</a:t>
+              <a:t>Priorizar el roadmap de iniciativas, balanceando impacto financiero, time to market, riesgo regulatorio y capacidades operativas.</a:t>
             </a:r>
             <a:endParaRPr kumimoji="0" lang="es-MX" sz="1000" b="0" i="0" u="none" strike="noStrike" kern="1200" cap="none" spc="0" normalizeH="0" baseline="0" noProof="0" dirty="0">
               <a:ln>
@@ -5773,13 +5773,13 @@
               <a:defRPr/>
             </a:pPr>
             <a:r>
-              <a:rPr lang="es-MX" sz="1000" dirty="0">
+              <a:rPr lang="es-MX" sz="900" dirty="0" b="0">
                 <a:solidFill>
                   <a:prstClr val="black"/>
                 </a:solidFill>
                 <a:latin typeface="Calibri Light" panose="020F0302020204030204"/>
               </a:rPr>
-              <a:t>Mantener el crecimiento sostenido del margen y la contribución de los servicios financieros en un entorno altamente competitivo y regulado.</a:t>
+              <a:t>Mantener el crecimiento sostenido del margen en un entorno altamente competitivo y regulado.</a:t>
             </a:r>
             <a:endParaRPr kumimoji="0" lang="es-MX" sz="1000" b="0" i="0" u="none" strike="noStrike" kern="1200" cap="none" spc="0" normalizeH="0" baseline="0" noProof="0" dirty="0">
               <a:ln>
@@ -5817,13 +5817,13 @@
               <a:defRPr/>
             </a:pPr>
             <a:r>
-              <a:rPr lang="es-MX" sz="1000" dirty="0">
+              <a:rPr lang="es-MX" sz="900" dirty="0" b="0">
                 <a:solidFill>
                   <a:prstClr val="black"/>
                 </a:solidFill>
                 <a:latin typeface="Calibri Light" panose="020F0302020204030204"/>
               </a:rPr>
-              <a:t>Desarrollar y escalar nuevas avenidas de crecimiento (nuevos servicios) con impacto real en el negocio.</a:t>
+              <a:t>Desarrollar y escalar nuevas avenidas de crecimiento con impacto real en el negocio.</a:t>
             </a:r>
             <a:endParaRPr kumimoji="0" lang="es-MX" sz="1000" b="0" i="0" u="none" strike="noStrike" kern="1200" cap="none" spc="0" normalizeH="0" baseline="0" noProof="0" dirty="0">
               <a:ln>
@@ -5861,13 +5861,13 @@
               <a:defRPr/>
             </a:pPr>
             <a:r>
-              <a:rPr lang="es-MX" sz="1000" dirty="0">
+              <a:rPr lang="es-MX" sz="900" dirty="0" b="0">
                 <a:solidFill>
                   <a:prstClr val="black"/>
                 </a:solidFill>
                 <a:latin typeface="Calibri Light" panose="020F0302020204030204"/>
               </a:rPr>
-              <a:t>Reducir el time to market de nuevos servicios financieros sin comprometer cumplimiento ni estabilidad operativa.</a:t>
+              <a:t>Reducir el time to market de nuevos servicios sin comprometer cumplimiento ni estabilidad operativa.</a:t>
             </a:r>
             <a:endParaRPr kumimoji="0" lang="es-MX" sz="1000" b="0" i="0" u="none" strike="noStrike" kern="1200" cap="none" spc="0" normalizeH="0" baseline="0" noProof="0" dirty="0">
               <a:ln>
@@ -5905,7 +5905,7 @@
               <a:defRPr/>
             </a:pPr>
             <a:r>
-              <a:rPr lang="es-MX" sz="1000" dirty="0">
+              <a:rPr lang="es-MX" sz="900" dirty="0" b="0">
                 <a:solidFill>
                   <a:prstClr val="black"/>
                 </a:solidFill>
@@ -5949,13 +5949,13 @@
               <a:defRPr/>
             </a:pPr>
             <a:r>
-              <a:rPr lang="es-MX" sz="1000" dirty="0">
+              <a:rPr lang="es-MX" sz="900" dirty="0" b="0">
                 <a:solidFill>
                   <a:prstClr val="black"/>
                 </a:solidFill>
                 <a:latin typeface="Calibri Light" panose="020F0302020204030204"/>
               </a:rPr>
-              <a:t>Lograr la alineación del equipo SPIN para el desarrollo de nuevas iniciativas, asegurando que las propuestas se construyan a partir del producto de casa y fortalezcan la marca interna.</a:t>
+              <a:t>Lograr la alineación del equipo SPIN para el desarrollo de nuevas iniciativas, construyendo desde el producto de casa y fortaleciendo la marca interna.</a:t>
             </a:r>
             <a:endParaRPr kumimoji="0" lang="es-MX" sz="1000" b="0" i="0" u="none" strike="noStrike" kern="1200" cap="none" spc="0" normalizeH="0" baseline="0" noProof="0" dirty="0">
               <a:ln>
@@ -9504,7 +9504,24 @@
                 <a:ea typeface="ＭＳ Ｐゴシック" charset="0"/>
                 <a:cs typeface="Arial"/>
               </a:rPr>
-              <a:t>Negocios: OXXO México</a:t>
+              <a:t>Negocios: </a:t>
+            </a:r>
+            <a:r>
+              <a:rPr kumimoji="0" lang="es-MX" sz="1200" b="0" i="0" u="none" strike="noStrike" kern="1200" cap="none" spc="0" normalizeH="0" baseline="0" noProof="0" dirty="0">
+                <a:ln>
+                  <a:noFill/>
+                </a:ln>
+                <a:solidFill>
+                  <a:prstClr val="black"/>
+                </a:solidFill>
+                <a:effectLst/>
+                <a:uLnTx/>
+                <a:uFillTx/>
+                <a:latin typeface="Calibri Light" panose="020F0302020204030204"/>
+                <a:ea typeface="ＭＳ Ｐゴシック" charset="0"/>
+                <a:cs typeface="Arial"/>
+              </a:rPr>
+              <a:t>OXXO México</a:t>
             </a:r>
             <a:endParaRPr kumimoji="0" lang="es-MX" sz="1200" b="0" i="0" u="none" strike="noStrike" kern="1200" cap="none" spc="0" normalizeH="0" baseline="0" noProof="0" dirty="0">
               <a:ln>
@@ -9591,7 +9608,24 @@
                 <a:ea typeface="ＭＳ Ｐゴシック" charset="0"/>
                 <a:cs typeface="Arial"/>
               </a:rPr>
-              <a:t>Alcance Geográfico: Nacional</a:t>
+              <a:t>Alcance Geográfico: </a:t>
+            </a:r>
+            <a:r>
+              <a:rPr kumimoji="0" lang="es-MX" sz="1200" b="0" i="0" u="none" strike="noStrike" kern="1200" cap="none" spc="0" normalizeH="0" baseline="0" noProof="0" dirty="0">
+                <a:ln>
+                  <a:noFill/>
+                </a:ln>
+                <a:solidFill>
+                  <a:prstClr val="black"/>
+                </a:solidFill>
+                <a:effectLst/>
+                <a:uLnTx/>
+                <a:uFillTx/>
+                <a:latin typeface="Calibri Light" panose="020F0302020204030204"/>
+                <a:ea typeface="ＭＳ Ｐゴシック" charset="0"/>
+                <a:cs typeface="Arial"/>
+              </a:rPr>
+              <a:t>Nacional</a:t>
             </a:r>
             <a:endParaRPr kumimoji="0" lang="es-MX" sz="1200" b="0" i="0" u="none" strike="noStrike" kern="1200" cap="none" spc="0" normalizeH="0" baseline="0" noProof="0" dirty="0">
               <a:ln>
@@ -9678,7 +9712,24 @@
                 <a:ea typeface="ＭＳ Ｐゴシック" charset="0"/>
                 <a:cs typeface="Arial"/>
               </a:rPr>
-              <a:t>Tramo de supervisión: 5 reportes directos</a:t>
+              <a:t>Tramo de supervisión: </a:t>
+            </a:r>
+            <a:r>
+              <a:rPr kumimoji="0" lang="es-MX" sz="1200" b="0" i="0" u="none" strike="noStrike" kern="1200" cap="none" spc="0" normalizeH="0" baseline="0" noProof="0" dirty="0">
+                <a:ln>
+                  <a:noFill/>
+                </a:ln>
+                <a:solidFill>
+                  <a:prstClr val="black"/>
+                </a:solidFill>
+                <a:effectLst/>
+                <a:uLnTx/>
+                <a:uFillTx/>
+                <a:latin typeface="Calibri Light" panose="020F0302020204030204"/>
+                <a:ea typeface="ＭＳ Ｐゴシック" charset="0"/>
+                <a:cs typeface="Arial"/>
+              </a:rPr>
+              <a:t>5 reportes directos</a:t>
             </a:r>
           </a:p>
           <a:p>
@@ -10030,7 +10081,7 @@
               <a:defRPr/>
             </a:pPr>
             <a:r>
-              <a:rPr kumimoji="0" lang="es-MX" sz="1200" b="1" i="0" u="none" strike="noStrike" kern="1200" cap="none" spc="0" normalizeH="0" baseline="0" noProof="0" dirty="0">
+              <a:rPr kumimoji="0" lang="es-MX" sz="900" b="1" i="0" u="none" strike="noStrike" kern="1200" cap="none" spc="0" normalizeH="0" baseline="0" noProof="0" dirty="0">
                 <a:ln>
                   <a:noFill/>
                 </a:ln>
@@ -10044,7 +10095,24 @@
                 <a:ea typeface="ＭＳ Ｐゴシック" charset="0"/>
                 <a:cs typeface="Arial"/>
               </a:rPr>
-              <a:t>Reportes Directos: Responsable Comercial Medios Pago (Vacante), Gerente Área Operaciones iCash (Juan Manuel Vazquez), Gerente Área Comercial Dispersión Efectivo (Jorge Castaños), Gerente Área Producto (José Manuel Vallejo), Gerente Área Comercial Corresponsalías (Fernando Bernal)</a:t>
+              <a:t>Reportes Directos: </a:t>
+            </a:r>
+            <a:r>
+              <a:rPr kumimoji="0" lang="es-MX" sz="900" b="0" i="0" u="none" strike="noStrike" kern="1200" cap="none" spc="0" normalizeH="0" baseline="0" noProof="0" dirty="0">
+                <a:ln>
+                  <a:noFill/>
+                </a:ln>
+                <a:solidFill>
+                  <a:prstClr val="black"/>
+                </a:solidFill>
+                <a:effectLst/>
+                <a:uLnTx/>
+                <a:uFillTx/>
+                <a:latin typeface="Calibri Light" panose="020F0302020204030204"/>
+                <a:ea typeface="ＭＳ Ｐゴシック" charset="0"/>
+                <a:cs typeface="Arial"/>
+              </a:rPr>
+              <a:t>Responsable Comercial Medios Pago (Vacante), Gerente Área Operaciones iCash (Juan Manuel Vazquez), Gerente Área Comercial Dispersión Efectivo (Jorge Castaños), Gerente Área Producto (José Manuel Vallejo), Gerente Área Comercial Corresponsalías (Fernando Bernal)</a:t>
             </a:r>
             <a:endParaRPr kumimoji="0" lang="es-MX" sz="1200" b="0" i="0" u="none" strike="noStrike" kern="1200" cap="none" spc="0" normalizeH="0" baseline="0" noProof="0" dirty="0">
               <a:ln>
@@ -10082,7 +10150,7 @@
               <a:defRPr/>
             </a:pPr>
             <a:r>
-              <a:rPr kumimoji="0" lang="es-MX" sz="1200" b="1" i="0" u="none" strike="noStrike" kern="1200" cap="none" spc="0" normalizeH="0" baseline="0" noProof="0" dirty="0">
+              <a:rPr kumimoji="0" lang="es-MX" sz="900" b="1" i="0" u="none" strike="noStrike" kern="1200" cap="none" spc="0" normalizeH="0" baseline="0" noProof="0" dirty="0">
                 <a:ln>
                   <a:noFill/>
                 </a:ln>
@@ -10096,7 +10164,24 @@
                 <a:ea typeface="ＭＳ Ｐゴシック" charset="0"/>
                 <a:cs typeface="Arial"/>
               </a:rPr>
-              <a:t>Pares: Gerente Sr Fullfilment, Gerente OXXO Cel, Gerente Sr Comercial Comercio Electrónico</a:t>
+              <a:t>Pares: </a:t>
+            </a:r>
+            <a:r>
+              <a:rPr kumimoji="0" lang="es-MX" sz="900" b="0" i="0" u="none" strike="noStrike" kern="1200" cap="none" spc="0" normalizeH="0" baseline="0" noProof="0" dirty="0">
+                <a:ln>
+                  <a:noFill/>
+                </a:ln>
+                <a:solidFill>
+                  <a:prstClr val="black"/>
+                </a:solidFill>
+                <a:effectLst/>
+                <a:uLnTx/>
+                <a:uFillTx/>
+                <a:latin typeface="Calibri Light" panose="020F0302020204030204"/>
+                <a:ea typeface="ＭＳ Ｐゴシック" charset="0"/>
+                <a:cs typeface="Arial"/>
+              </a:rPr>
+              <a:t>Gerente Sr Fullfilment, Gerente OXXO Cel, Gerente Sr Comercial Comercio Electrónico</a:t>
             </a:r>
             <a:endParaRPr kumimoji="0" lang="es-MX" sz="1200" b="0" i="0" u="none" strike="noStrike" kern="1200" cap="none" spc="0" normalizeH="0" baseline="0" noProof="0" dirty="0">
               <a:ln>
@@ -11841,6 +11926,7 @@
                         <a:cs typeface="Arial" panose="020B0604020202020204" pitchFamily="34" charset="0"/>
                       </a:endParaRPr>
                       <a:r>
+                        <a:rPr sz="1050" b="0"/>
                         <a:t>Director Estrategia y Transformación</a:t>
                       </a:r>
                     </a:p>
@@ -11904,6 +11990,7 @@
                         <a:cs typeface="Arial" panose="020B0604020202020204" pitchFamily="34" charset="0"/>
                       </a:endParaRPr>
                       <a:r>
+                        <a:rPr sz="1050" b="0"/>
                         <a:t>Alineación estratégica y rendición de cuentas del área</a:t>
                       </a:r>
                     </a:p>
@@ -11981,6 +12068,7 @@
                         <a:cs typeface="Arial" panose="020B0604020202020204" pitchFamily="34" charset="0"/>
                       </a:endParaRPr>
                       <a:r>
+                        <a:rPr sz="1050" b="0"/>
                         <a:t>Mensual</a:t>
                       </a:r>
                     </a:p>
@@ -12038,6 +12126,7 @@
                     <a:p>
                       <a:endParaRPr lang="es-MX"/>
                       <a:r>
+                        <a:rPr sz="900" b="1"/>
                         <a:t/>
                       </a:r>
                     </a:p>
@@ -12064,6 +12153,7 @@
                         <a:cs typeface="Arial" panose="020B0604020202020204" pitchFamily="34" charset="0"/>
                       </a:endParaRPr>
                       <a:r>
+                        <a:rPr sz="1050" b="0"/>
                         <a:t>TI</a:t>
                       </a:r>
                     </a:p>
@@ -12130,6 +12220,7 @@
                         <a:cs typeface="Arial" panose="020B0604020202020204" pitchFamily="34" charset="0"/>
                       </a:endParaRPr>
                       <a:r>
+                        <a:rPr sz="1050" b="0"/>
                         <a:t>Integración tecnológica y habilitación de servicios financieros</a:t>
                       </a:r>
                     </a:p>
@@ -12207,6 +12298,7 @@
                         <a:cs typeface="Arial" panose="020B0604020202020204" pitchFamily="34" charset="0"/>
                       </a:endParaRPr>
                       <a:r>
+                        <a:rPr sz="1050" b="0"/>
                         <a:t>Semanal</a:t>
                       </a:r>
                     </a:p>
@@ -12264,6 +12356,7 @@
                     <a:p>
                       <a:endParaRPr lang="es-MX"/>
                       <a:r>
+                        <a:rPr sz="900" b="1"/>
                         <a:t/>
                       </a:r>
                     </a:p>
@@ -12290,6 +12383,7 @@
                         <a:cs typeface="Arial" panose="020B0604020202020204" pitchFamily="34" charset="0"/>
                       </a:endParaRPr>
                       <a:r>
+                        <a:rPr sz="1050" b="0"/>
                         <a:t>Finanzas y Legal</a:t>
                       </a:r>
                     </a:p>
@@ -12367,6 +12461,7 @@
                         <a:cs typeface="Arial" panose="020B0604020202020204" pitchFamily="34" charset="0"/>
                       </a:endParaRPr>
                       <a:r>
+                        <a:rPr sz="1050" b="0"/>
                         <a:t>Cumplimiento regulatorio y gestión de riesgos financieros</a:t>
                       </a:r>
                     </a:p>
@@ -12444,6 +12539,7 @@
                         <a:cs typeface="Arial" panose="020B0604020202020204" pitchFamily="34" charset="0"/>
                       </a:endParaRPr>
                       <a:r>
+                        <a:rPr sz="1050" b="0"/>
                         <a:t>Mensual</a:t>
                       </a:r>
                     </a:p>
@@ -12501,6 +12597,7 @@
                     <a:p>
                       <a:endParaRPr lang="es-MX"/>
                       <a:r>
+                        <a:rPr sz="900" b="1"/>
                         <a:t/>
                       </a:r>
                     </a:p>
@@ -12527,6 +12624,7 @@
                         <a:cs typeface="Arial" panose="020B0604020202020204" pitchFamily="34" charset="0"/>
                       </a:endParaRPr>
                       <a:r>
+                        <a:rPr sz="1050" b="0"/>
                         <a:t>Operaciones</a:t>
                       </a:r>
                     </a:p>
@@ -12604,6 +12702,7 @@
                         <a:cs typeface="Arial" panose="020B0604020202020204" pitchFamily="34" charset="0"/>
                       </a:endParaRPr>
                       <a:r>
+                        <a:rPr sz="1050" b="0"/>
                         <a:t>Ejecución y habilitación de servicios financieros en tienda</a:t>
                       </a:r>
                     </a:p>
@@ -12681,6 +12780,7 @@
                         <a:cs typeface="Arial" panose="020B0604020202020204" pitchFamily="34" charset="0"/>
                       </a:endParaRPr>
                       <a:r>
+                        <a:rPr sz="1050" b="0"/>
                         <a:t>Quincenal</a:t>
                       </a:r>
                     </a:p>
@@ -12738,6 +12838,7 @@
                     <a:p>
                       <a:endParaRPr lang="es-MX"/>
                       <a:r>
+                        <a:rPr sz="900" b="1"/>
                         <a:t>EXTERNAS</a:t>
                       </a:r>
                     </a:p>
@@ -12764,6 +12865,7 @@
                         <a:cs typeface="Arial" panose="020B0604020202020204" pitchFamily="34" charset="0"/>
                       </a:endParaRPr>
                       <a:r>
+                        <a:rPr sz="1050" b="0"/>
                         <a:t>Socios Financieros (bancos, fintechs)</a:t>
                       </a:r>
                     </a:p>
@@ -12841,7 +12943,8 @@
                         <a:cs typeface="Arial" panose="020B0604020202020204" pitchFamily="34" charset="0"/>
                       </a:endParaRPr>
                       <a:r>
-                        <a:t>Negociación y desarrollo de nuevos productos y servicios</a:t>
+                        <a:rPr sz="1050" b="0"/>
+                        <a:t>Negociación y desarrollo de nuevos productos</a:t>
                       </a:r>
                     </a:p>
                   </a:txBody>
@@ -12918,6 +13021,7 @@
                         <a:cs typeface="Arial" panose="020B0604020202020204" pitchFamily="34" charset="0"/>
                       </a:endParaRPr>
                       <a:r>
+                        <a:rPr sz="1050" b="0"/>
                         <a:t>Mensual</a:t>
                       </a:r>
                     </a:p>
